--- a/mmacos/templates/80_end_to_end/e2e6m/deck_e2e6m.pptx
+++ b/mmacos/templates/80_end_to_end/e2e6m/deck_e2e6m.pptx
@@ -18,6 +18,8 @@
     <p:sldId id="266" r:id="rId17"/>
     <p:sldId id="267" r:id="rId18"/>
     <p:sldId id="268" r:id="rId19"/>
+    <p:sldId id="269" r:id="rId20"/>
+    <p:sldId id="270" r:id="rId21"/>
   </p:sldIdLst>
   <p:sldSz cx="12191695" cy="6858000" type="screen4x3"/>
   <p:notesSz cx="6858000" cy="9144000"/>
@@ -4435,7 +4437,7 @@
                 </a:solidFill>
                 <a:latin typeface="Arial"/>
               </a:rPr>
-              <a:t>What is not in this model</a:t>
+              <a:t>What the segment gaps cost, and what does not buy it back</a:t>
             </a:r>
           </a:p>
           <a:p>
@@ -4451,7 +4453,7 @@
                 </a:solidFill>
                 <a:latin typeface="Arial"/>
               </a:rPr>
-              <a:t>Stated, not omitted</a:t>
+              <a:t>The redesign recovers 1.10×</a:t>
             </a:r>
           </a:p>
         </p:txBody>
@@ -4509,7 +4511,7 @@
         <p:spPr>
           <a:xfrm>
             <a:off x="411480" y="1298448"/>
-            <a:ext cx="11368735" cy="274320"/>
+            <a:ext cx="5806440" cy="274320"/>
           </a:xfrm>
           <a:prstGeom prst="rect">
             <a:avLst/>
@@ -4543,16 +4545,16 @@
                 </a:solidFill>
                 <a:latin typeface="Arial"/>
               </a:rPr>
-              <a:t>No deformable mirrors and no field stop.</a:t>
-            </a:r>
-            <a:r>
-              <a:rPr sz="1200" b="0">
-                <a:solidFill>
-                  <a:srgbClr val="282828"/>
-                </a:solidFill>
-                <a:latin typeface="Arial"/>
-              </a:rPr>
-              <a:t> The reference testbed model carries both. Without them the contrast here is an open-loop number — what the optics deliver, not what a wavefront-control loop would hold — and the dark zone is not the annulus two deformable mirrors would give.</a:t>
+              <a:t>The attempt.</a:t>
+            </a:r>
+            <a:r>
+              <a:rPr sz="1200" b="0">
+                <a:solidFill>
+                  <a:srgbClr val="282828"/>
+                </a:solidFill>
+                <a:latin typeface="Arial"/>
+              </a:rPr>
+              <a:t> Redesign the apodizer for the segmented pupil two ways: the globally optimal transmission mask from a linear program, and the aperture-specific version of the same eigenfunction the incumbent uses.</a:t>
             </a:r>
           </a:p>
           <a:p>
@@ -4577,16 +4579,16 @@
                 </a:solidFill>
                 <a:latin typeface="Arial"/>
               </a:rPr>
-              <a:t>No metrology loop.</a:t>
-            </a:r>
-            <a:r>
-              <a:rPr sz="1200" b="0">
-                <a:solidFill>
-                  <a:srgbClr val="282828"/>
-                </a:solidFill>
-                <a:latin typeface="Arial"/>
-              </a:rPr>
-              <a:t> The correction in the drift series is image-based: it sees the wavefront directly rather than estimating it from a truss. The corrected leg is therefore an optimistic bound.</a:t>
+              <a:t>Neither beats the incumbent.</a:t>
+            </a:r>
+            <a:r>
+              <a:rPr sz="1200" b="0">
+                <a:solidFill>
+                  <a:srgbClr val="282828"/>
+                </a:solidFill>
+                <a:latin typeface="Arial"/>
+              </a:rPr>
+              <a:t> The aperture-specific mask recovers 1.10× in dark-zone mean and 0.57× in median, at 0.73× the throughput. No rung of the linear program beat it either.</a:t>
             </a:r>
           </a:p>
           <a:p>
@@ -4611,16 +4613,16 @@
                 </a:solidFill>
                 <a:latin typeface="Arial"/>
               </a:rPr>
-              <a:t>The coronagraph mask is a clear-pupil design.</a:t>
-            </a:r>
-            <a:r>
-              <a:rPr sz="1200" b="0">
-                <a:solidFill>
-                  <a:srgbClr val="282828"/>
-                </a:solidFill>
-                <a:latin typeface="Arial"/>
-              </a:rPr>
-              <a:t> Re-optimising it for a segmented aperture is a known and separate piece of work; the 2390× above is the size of the prize.</a:t>
+              <a:t>Why, measured.</a:t>
+            </a:r>
+            <a:r>
+              <a:rPr sz="1200" b="0">
+                <a:solidFill>
+                  <a:srgbClr val="282828"/>
+                </a:solidFill>
+                <a:latin typeface="Arial"/>
+              </a:rPr>
+              <a:t> The design model is a single Fourier transform; the real back end is a multi-leg chain. It reproduces the bare image to 1.2% but floors near 4e-06 against the engine — five times above the contrast the incumbent already reaches.</a:t>
             </a:r>
           </a:p>
           <a:p>
@@ -4636,7 +4638,431 @@
                 </a:solidFill>
                 <a:latin typeface="Arial"/>
               </a:rPr>
-              <a:t>•  Both additions are existing primitives in the toolkit, so the extension is configuration rather than new machinery.</a:t>
+              <a:t>•  </a:t>
+            </a:r>
+            <a:r>
+              <a:rPr sz="1200" b="1">
+                <a:solidFill>
+                  <a:srgbClr val="282828"/>
+                </a:solidFill>
+                <a:latin typeface="Arial"/>
+              </a:rPr>
+              <a:t>A negative result, priced.</a:t>
+            </a:r>
+            <a:r>
+              <a:rPr sz="1200" b="0">
+                <a:solidFill>
+                  <a:srgbClr val="282828"/>
+                </a:solidFill>
+                <a:latin typeface="Arial"/>
+              </a:rPr>
+              <a:t> The gap penalty is real and an apodizer alone does not remove it. What would fix it is a design operator matching the propagation it is scored against — queued, not attempted here.</a:t>
+            </a:r>
+          </a:p>
+        </p:txBody>
+      </p:sp>
+      <p:graphicFrame>
+        <p:nvGraphicFramePr>
+          <p:cNvPr id="5" name="Table 4"/>
+          <p:cNvGraphicFramePr>
+            <a:graphicFrameLocks noGrp="1"/>
+          </p:cNvGraphicFramePr>
+          <p:nvPr/>
+        </p:nvGraphicFramePr>
+        <p:xfrm>
+          <a:off x="6400800" y="1298448"/>
+          <a:ext cx="5394959" cy="1314450"/>
+        </p:xfrm>
+        <a:graphic>
+          <a:graphicData uri="http://schemas.openxmlformats.org/drawingml/2006/table">
+            <a:tbl>
+              <a:tblPr firstRow="1" bandRow="1">
+                <a:tableStyleId>{5C22544A-7EE6-4342-B048-85BDC9FD1C3A}</a:tableStyleId>
+              </a:tblPr>
+              <a:tblGrid>
+                <a:gridCol w="2752530"/>
+                <a:gridCol w="1541417"/>
+                <a:gridCol w="1101012"/>
+              </a:tblGrid>
+              <a:tr h="262890">
+                <a:tc>
+                  <a:txBody>
+                    <a:bodyPr wrap="square"/>
+                    <a:lstStyle/>
+                    <a:p>
+                      <a:r>
+                        <a:rPr sz="1000" b="1">
+                          <a:solidFill>
+                            <a:srgbClr val="FFFFFF"/>
+                          </a:solidFill>
+                          <a:latin typeface="Arial"/>
+                        </a:rPr>
+                        <a:t>configuration</a:t>
+                      </a:r>
+                    </a:p>
+                  </a:txBody>
+                  <a:tcPr marL="54864" marR="54864" marT="18288" marB="18288">
+                    <a:solidFill>
+                      <a:srgbClr val="1F4E79"/>
+                    </a:solidFill>
+                  </a:tcPr>
+                </a:tc>
+                <a:tc>
+                  <a:txBody>
+                    <a:bodyPr wrap="square"/>
+                    <a:lstStyle/>
+                    <a:p>
+                      <a:r>
+                        <a:rPr sz="1000" b="1">
+                          <a:solidFill>
+                            <a:srgbClr val="FFFFFF"/>
+                          </a:solidFill>
+                          <a:latin typeface="Arial"/>
+                        </a:rPr>
+                        <a:t>dark-zone mean</a:t>
+                      </a:r>
+                    </a:p>
+                  </a:txBody>
+                  <a:tcPr marL="54864" marR="54864" marT="18288" marB="18288">
+                    <a:solidFill>
+                      <a:srgbClr val="1F4E79"/>
+                    </a:solidFill>
+                  </a:tcPr>
+                </a:tc>
+                <a:tc>
+                  <a:txBody>
+                    <a:bodyPr wrap="square"/>
+                    <a:lstStyle/>
+                    <a:p>
+                      <a:r>
+                        <a:rPr sz="1000" b="1">
+                          <a:solidFill>
+                            <a:srgbClr val="FFFFFF"/>
+                          </a:solidFill>
+                          <a:latin typeface="Arial"/>
+                        </a:rPr>
+                        <a:t>throughput</a:t>
+                      </a:r>
+                    </a:p>
+                  </a:txBody>
+                  <a:tcPr marL="54864" marR="54864" marT="18288" marB="18288">
+                    <a:solidFill>
+                      <a:srgbClr val="1F4E79"/>
+                    </a:solidFill>
+                  </a:tcPr>
+                </a:tc>
+              </a:tr>
+              <a:tr h="262890">
+                <a:tc>
+                  <a:txBody>
+                    <a:bodyPr wrap="square"/>
+                    <a:lstStyle/>
+                    <a:p>
+                      <a:r>
+                        <a:rPr sz="1000" b="0">
+                          <a:solidFill>
+                            <a:srgbClr val="282828"/>
+                          </a:solidFill>
+                          <a:latin typeface="Arial"/>
+                        </a:rPr>
+                        <a:t>bare segmented (baseline)</a:t>
+                      </a:r>
+                    </a:p>
+                  </a:txBody>
+                  <a:tcPr marL="54864" marR="54864" marT="18288" marB="18288">
+                    <a:solidFill>
+                      <a:srgbClr val="FFFFFF"/>
+                    </a:solidFill>
+                  </a:tcPr>
+                </a:tc>
+                <a:tc>
+                  <a:txBody>
+                    <a:bodyPr wrap="square"/>
+                    <a:lstStyle/>
+                    <a:p>
+                      <a:r>
+                        <a:rPr sz="1000" b="0">
+                          <a:solidFill>
+                            <a:srgbClr val="282828"/>
+                          </a:solidFill>
+                          <a:latin typeface="Arial"/>
+                        </a:rPr>
+                        <a:t>8.700e-07</a:t>
+                      </a:r>
+                    </a:p>
+                  </a:txBody>
+                  <a:tcPr marL="54864" marR="54864" marT="18288" marB="18288">
+                    <a:solidFill>
+                      <a:srgbClr val="FFFFFF"/>
+                    </a:solidFill>
+                  </a:tcPr>
+                </a:tc>
+                <a:tc>
+                  <a:txBody>
+                    <a:bodyPr wrap="square"/>
+                    <a:lstStyle/>
+                    <a:p>
+                      <a:r>
+                        <a:rPr sz="1000" b="0">
+                          <a:solidFill>
+                            <a:srgbClr val="282828"/>
+                          </a:solidFill>
+                          <a:latin typeface="Arial"/>
+                        </a:rPr>
+                        <a:t>0.100</a:t>
+                      </a:r>
+                    </a:p>
+                  </a:txBody>
+                  <a:tcPr marL="54864" marR="54864" marT="18288" marB="18288">
+                    <a:solidFill>
+                      <a:srgbClr val="FFFFFF"/>
+                    </a:solidFill>
+                  </a:tcPr>
+                </a:tc>
+              </a:tr>
+              <a:tr h="262890">
+                <a:tc>
+                  <a:txBody>
+                    <a:bodyPr wrap="square"/>
+                    <a:lstStyle/>
+                    <a:p>
+                      <a:r>
+                        <a:rPr sz="1000" b="0">
+                          <a:solidFill>
+                            <a:srgbClr val="282828"/>
+                          </a:solidFill>
+                          <a:latin typeface="Arial"/>
+                        </a:rPr>
+                        <a:t>aperture-specific mask</a:t>
+                      </a:r>
+                    </a:p>
+                  </a:txBody>
+                  <a:tcPr marL="54864" marR="54864" marT="18288" marB="18288">
+                    <a:solidFill>
+                      <a:srgbClr val="ECF1F6"/>
+                    </a:solidFill>
+                  </a:tcPr>
+                </a:tc>
+                <a:tc>
+                  <a:txBody>
+                    <a:bodyPr wrap="square"/>
+                    <a:lstStyle/>
+                    <a:p>
+                      <a:r>
+                        <a:rPr sz="1000" b="0">
+                          <a:solidFill>
+                            <a:srgbClr val="282828"/>
+                          </a:solidFill>
+                          <a:latin typeface="Arial"/>
+                        </a:rPr>
+                        <a:t>7.909e-07</a:t>
+                      </a:r>
+                    </a:p>
+                  </a:txBody>
+                  <a:tcPr marL="54864" marR="54864" marT="18288" marB="18288">
+                    <a:solidFill>
+                      <a:srgbClr val="ECF1F6"/>
+                    </a:solidFill>
+                  </a:tcPr>
+                </a:tc>
+                <a:tc>
+                  <a:txBody>
+                    <a:bodyPr wrap="square"/>
+                    <a:lstStyle/>
+                    <a:p>
+                      <a:r>
+                        <a:rPr sz="1000" b="0">
+                          <a:solidFill>
+                            <a:srgbClr val="282828"/>
+                          </a:solidFill>
+                          <a:latin typeface="Arial"/>
+                        </a:rPr>
+                        <a:t>0.073</a:t>
+                      </a:r>
+                    </a:p>
+                  </a:txBody>
+                  <a:tcPr marL="54864" marR="54864" marT="18288" marB="18288">
+                    <a:solidFill>
+                      <a:srgbClr val="ECF1F6"/>
+                    </a:solidFill>
+                  </a:tcPr>
+                </a:tc>
+              </a:tr>
+              <a:tr h="262890">
+                <a:tc>
+                  <a:txBody>
+                    <a:bodyPr wrap="square"/>
+                    <a:lstStyle/>
+                    <a:p>
+                      <a:r>
+                        <a:rPr sz="1000" b="0">
+                          <a:solidFill>
+                            <a:srgbClr val="282828"/>
+                          </a:solidFill>
+                          <a:latin typeface="Arial"/>
+                        </a:rPr>
+                        <a:t>linear-program mask</a:t>
+                      </a:r>
+                    </a:p>
+                  </a:txBody>
+                  <a:tcPr marL="54864" marR="54864" marT="18288" marB="18288">
+                    <a:solidFill>
+                      <a:srgbClr val="FFFFFF"/>
+                    </a:solidFill>
+                  </a:tcPr>
+                </a:tc>
+                <a:tc>
+                  <a:txBody>
+                    <a:bodyPr wrap="square"/>
+                    <a:lstStyle/>
+                    <a:p>
+                      <a:r>
+                        <a:rPr sz="1000" b="0">
+                          <a:solidFill>
+                            <a:srgbClr val="282828"/>
+                          </a:solidFill>
+                          <a:latin typeface="Arial"/>
+                        </a:rPr>
+                        <a:t>1.505e-06</a:t>
+                      </a:r>
+                    </a:p>
+                  </a:txBody>
+                  <a:tcPr marL="54864" marR="54864" marT="18288" marB="18288">
+                    <a:solidFill>
+                      <a:srgbClr val="FFFFFF"/>
+                    </a:solidFill>
+                  </a:tcPr>
+                </a:tc>
+                <a:tc>
+                  <a:txBody>
+                    <a:bodyPr wrap="square"/>
+                    <a:lstStyle/>
+                    <a:p>
+                      <a:r>
+                        <a:rPr sz="1000" b="0">
+                          <a:solidFill>
+                            <a:srgbClr val="282828"/>
+                          </a:solidFill>
+                          <a:latin typeface="Arial"/>
+                        </a:rPr>
+                        <a:t>0.175</a:t>
+                      </a:r>
+                    </a:p>
+                  </a:txBody>
+                  <a:tcPr marL="54864" marR="54864" marT="18288" marB="18288">
+                    <a:solidFill>
+                      <a:srgbClr val="FFFFFF"/>
+                    </a:solidFill>
+                  </a:tcPr>
+                </a:tc>
+              </a:tr>
+              <a:tr h="262890">
+                <a:tc>
+                  <a:txBody>
+                    <a:bodyPr wrap="square"/>
+                    <a:lstStyle/>
+                    <a:p>
+                      <a:r>
+                        <a:rPr sz="1000" b="0">
+                          <a:solidFill>
+                            <a:srgbClr val="282828"/>
+                          </a:solidFill>
+                          <a:latin typeface="Arial"/>
+                        </a:rPr>
+                        <a:t>clear-pupil reference</a:t>
+                      </a:r>
+                    </a:p>
+                  </a:txBody>
+                  <a:tcPr marL="54864" marR="54864" marT="18288" marB="18288">
+                    <a:solidFill>
+                      <a:srgbClr val="ECF1F6"/>
+                    </a:solidFill>
+                  </a:tcPr>
+                </a:tc>
+                <a:tc>
+                  <a:txBody>
+                    <a:bodyPr wrap="square"/>
+                    <a:lstStyle/>
+                    <a:p>
+                      <a:r>
+                        <a:rPr sz="1000" b="0">
+                          <a:solidFill>
+                            <a:srgbClr val="282828"/>
+                          </a:solidFill>
+                          <a:latin typeface="Arial"/>
+                        </a:rPr>
+                        <a:t>3.640e-10</a:t>
+                      </a:r>
+                    </a:p>
+                  </a:txBody>
+                  <a:tcPr marL="54864" marR="54864" marT="18288" marB="18288">
+                    <a:solidFill>
+                      <a:srgbClr val="ECF1F6"/>
+                    </a:solidFill>
+                  </a:tcPr>
+                </a:tc>
+                <a:tc>
+                  <a:txBody>
+                    <a:bodyPr wrap="square"/>
+                    <a:lstStyle/>
+                    <a:p>
+                      <a:r>
+                        <a:rPr sz="1000" b="0">
+                          <a:solidFill>
+                            <a:srgbClr val="282828"/>
+                          </a:solidFill>
+                          <a:latin typeface="Arial"/>
+                        </a:rPr>
+                        <a:t>0.100</a:t>
+                      </a:r>
+                    </a:p>
+                  </a:txBody>
+                  <a:tcPr marL="54864" marR="54864" marT="18288" marB="18288">
+                    <a:solidFill>
+                      <a:srgbClr val="ECF1F6"/>
+                    </a:solidFill>
+                  </a:tcPr>
+                </a:tc>
+              </a:tr>
+            </a:tbl>
+          </a:graphicData>
+        </a:graphic>
+      </p:graphicFrame>
+      <p:sp>
+        <p:nvSpPr>
+          <p:cNvPr id="6" name="TextBox 5"/>
+          <p:cNvSpPr txBox="1"/>
+          <p:nvPr/>
+        </p:nvSpPr>
+        <p:spPr>
+          <a:xfrm>
+            <a:off x="6400800" y="2759202"/>
+            <a:ext cx="5394960" cy="274320"/>
+          </a:xfrm>
+          <a:prstGeom prst="rect">
+            <a:avLst/>
+          </a:prstGeom>
+          <a:noFill/>
+        </p:spPr>
+        <p:txBody>
+          <a:bodyPr wrap="square">
+            <a:spAutoFit/>
+          </a:bodyPr>
+          <a:lstStyle/>
+          <a:p>
+            <a:pPr>
+              <a:spcAft>
+                <a:spcPts val="600"/>
+              </a:spcAft>
+            </a:pPr>
+            <a:r>
+              <a:rPr sz="1050" b="0">
+                <a:solidFill>
+                  <a:srgbClr val="6E6E6E"/>
+                </a:solidFill>
+                <a:latin typeface="Arial"/>
+              </a:rPr>
+              <a:t>Same plane, same mask geometry, same 3–15 λ/D annulus as the main-path number.</a:t>
             </a:r>
           </a:p>
         </p:txBody>
@@ -4693,7 +5119,7 @@
                 </a:solidFill>
                 <a:latin typeface="Arial"/>
               </a:rPr>
-              <a:t>How to reproduce</a:t>
+              <a:t>How to tell an optimizer is mining its model</a:t>
             </a:r>
           </a:p>
           <a:p>
@@ -4709,7 +5135,7 @@
                 </a:solidFill>
                 <a:latin typeface="Arial"/>
               </a:rPr>
-              <a:t>Every number on these slides comes from these runs</a:t>
+              <a:t>The disagreement grows 4.8× → 40.0× as you push it</a:t>
             </a:r>
           </a:p>
         </p:txBody>
@@ -4767,7 +5193,7 @@
         <p:spPr>
           <a:xfrm>
             <a:off x="411480" y="1298448"/>
-            <a:ext cx="11368735" cy="274320"/>
+            <a:ext cx="5806440" cy="274320"/>
           </a:xfrm>
           <a:prstGeom prst="rect">
             <a:avLst/>
@@ -4792,7 +5218,25 @@
                 </a:solidFill>
                 <a:latin typeface="Arial"/>
               </a:rPr>
-              <a:t>•  s1_layout_search then s1_telescope — the layout pick and the telescope.</a:t>
+              <a:t>•  </a:t>
+            </a:r>
+            <a:r>
+              <a:rPr sz="1200" b="1">
+                <a:solidFill>
+                  <a:srgbClr val="282828"/>
+                </a:solidFill>
+                <a:latin typeface="Arial"/>
+              </a:rPr>
+              <a:t>The design model and the engine are not the same code.</a:t>
+            </a:r>
+            <a:r>
+              <a:rPr sz="1200" b="0">
+                <a:solidFill>
+                  <a:srgbClr val="282828"/>
+                </a:solidFill>
+                <a:latin typeface="Arial"/>
+              </a:rPr>
+              <a:t> One is a single Fourier transform, the other propagates the real multi-leg chain. Ask the optimizer for a deeper dark zone and it spends the difference.</a:t>
             </a:r>
           </a:p>
           <a:p>
@@ -4808,7 +5252,25 @@
                 </a:solidFill>
                 <a:latin typeface="Arial"/>
               </a:rPr>
-              <a:t>•  s2_segmentation — the segmented primary and its edge-sensor sidecar.</a:t>
+              <a:t>•  </a:t>
+            </a:r>
+            <a:r>
+              <a:rPr sz="1200" b="1">
+                <a:solidFill>
+                  <a:srgbClr val="282828"/>
+                </a:solidFill>
+                <a:latin typeface="Arial"/>
+              </a:rPr>
+              <a:t>The pattern is the diagnosis.</a:t>
+            </a:r>
+            <a:r>
+              <a:rPr sz="1200" b="0">
+                <a:solidFill>
+                  <a:srgbClr val="282828"/>
+                </a:solidFill>
+                <a:latin typeface="Arial"/>
+              </a:rPr>
+              <a:t> A fixed offset would be a calibration error. An offset that grows monotonically with the demand is the optimizer finding more of the model's error the harder it is pushed — and it shows up without knowing the true answer.</a:t>
             </a:r>
           </a:p>
           <a:p>
@@ -4824,7 +5286,25 @@
                 </a:solidFill>
                 <a:latin typeface="Arial"/>
               </a:rPr>
-              <a:t>•  s3_backend, s3_train_fig then s3_coro — the instrument, its layout render, and the coronagraph on both apertures.</a:t>
+              <a:t>•  </a:t>
+            </a:r>
+            <a:r>
+              <a:rPr sz="1200" b="1">
+                <a:solidFill>
+                  <a:srgbClr val="282828"/>
+                </a:solidFill>
+                <a:latin typeface="Arial"/>
+              </a:rPr>
+              <a:t>Isolated in six experiments.</a:t>
+            </a:r>
+            <a:r>
+              <a:rPr sz="1200" b="0">
+                <a:solidFill>
+                  <a:srgbClr val="282828"/>
+                </a:solidFill>
+                <a:latin typeface="Arial"/>
+              </a:rPr>
+              <a:t> The bare image agrees to 1.2%; the engine applies the mask with residual exactly zero; every diffraction ring lands at the right radius; and feeding the engine's own post-mask field back through the model still lands on the model's floor.</a:t>
             </a:r>
           </a:p>
           <a:p>
@@ -4840,53 +5320,427 @@
                 </a:solidFill>
                 <a:latin typeface="Arial"/>
               </a:rPr>
-              <a:t>•  s4_sensitivities — the error budget, roughly half an hour.</a:t>
-            </a:r>
-          </a:p>
-          <a:p>
-            <a:pPr>
-              <a:spcAft>
-                <a:spcPts val="600"/>
-              </a:spcAft>
-            </a:pPr>
-            <a:r>
-              <a:rPr sz="1200" b="0">
-                <a:solidFill>
-                  <a:srgbClr val="282828"/>
-                </a:solidFill>
-                <a:latin typeface="Arial"/>
-              </a:rPr>
-              <a:t>•  s5_timeseries — the drift series.</a:t>
-            </a:r>
-          </a:p>
-          <a:p>
-            <a:pPr>
-              <a:spcAft>
-                <a:spcPts val="600"/>
-              </a:spcAft>
-            </a:pPr>
-            <a:r>
-              <a:rPr sz="1200" b="0">
-                <a:solidFill>
-                  <a:srgbClr val="282828"/>
-                </a:solidFill>
-                <a:latin typeface="Arial"/>
-              </a:rPr>
-              <a:t>•  python3 deck_e2e6m.py — this deck, from the reports those runs wrote.</a:t>
-            </a:r>
-          </a:p>
-        </p:txBody>
-      </p:sp>
-      <p:sp>
-        <p:nvSpPr>
-          <p:cNvPr id="5" name="TextBox 4"/>
+              <a:t>•  </a:t>
+            </a:r>
+            <a:r>
+              <a:rPr sz="1200" b="1">
+                <a:solidFill>
+                  <a:srgbClr val="282828"/>
+                </a:solidFill>
+                <a:latin typeface="Arial"/>
+              </a:rPr>
+              <a:t>Worth reusing.</a:t>
+            </a:r>
+            <a:r>
+              <a:rPr sz="1200" b="0">
+                <a:solidFill>
+                  <a:srgbClr val="282828"/>
+                </a:solidFill>
+                <a:latin typeface="Arial"/>
+              </a:rPr>
+              <a:t> Any time a design model is cheaper than the simulator it feeds, run the ladder and watch the trend rather than a single agreement number.</a:t>
+            </a:r>
+          </a:p>
+        </p:txBody>
+      </p:sp>
+      <p:graphicFrame>
+        <p:nvGraphicFramePr>
+          <p:cNvPr id="5" name="Table 4"/>
+          <p:cNvGraphicFramePr>
+            <a:graphicFrameLocks noGrp="1"/>
+          </p:cNvGraphicFramePr>
+          <p:nvPr/>
+        </p:nvGraphicFramePr>
+        <p:xfrm>
+          <a:off x="6400800" y="1298448"/>
+          <a:ext cx="5394958" cy="1051560"/>
+        </p:xfrm>
+        <a:graphic>
+          <a:graphicData uri="http://schemas.openxmlformats.org/drawingml/2006/table">
+            <a:tbl>
+              <a:tblPr firstRow="1" bandRow="1">
+                <a:tableStyleId>{5C22544A-7EE6-4342-B048-85BDC9FD1C3A}</a:tableStyleId>
+              </a:tblPr>
+              <a:tblGrid>
+                <a:gridCol w="1277753"/>
+                <a:gridCol w="1419726"/>
+                <a:gridCol w="1561698"/>
+                <a:gridCol w="1135781"/>
+              </a:tblGrid>
+              <a:tr h="262890">
+                <a:tc>
+                  <a:txBody>
+                    <a:bodyPr wrap="square"/>
+                    <a:lstStyle/>
+                    <a:p>
+                      <a:r>
+                        <a:rPr sz="1000" b="1">
+                          <a:solidFill>
+                            <a:srgbClr val="FFFFFF"/>
+                          </a:solidFill>
+                          <a:latin typeface="Arial"/>
+                        </a:rPr>
+                        <a:t>LP target</a:t>
+                      </a:r>
+                    </a:p>
+                  </a:txBody>
+                  <a:tcPr marL="54864" marR="54864" marT="18288" marB="18288">
+                    <a:solidFill>
+                      <a:srgbClr val="1F4E79"/>
+                    </a:solidFill>
+                  </a:tcPr>
+                </a:tc>
+                <a:tc>
+                  <a:txBody>
+                    <a:bodyPr wrap="square"/>
+                    <a:lstStyle/>
+                    <a:p>
+                      <a:r>
+                        <a:rPr sz="1000" b="1">
+                          <a:solidFill>
+                            <a:srgbClr val="FFFFFF"/>
+                          </a:solidFill>
+                          <a:latin typeface="Arial"/>
+                        </a:rPr>
+                        <a:t>model says</a:t>
+                      </a:r>
+                    </a:p>
+                  </a:txBody>
+                  <a:tcPr marL="54864" marR="54864" marT="18288" marB="18288">
+                    <a:solidFill>
+                      <a:srgbClr val="1F4E79"/>
+                    </a:solidFill>
+                  </a:tcPr>
+                </a:tc>
+                <a:tc>
+                  <a:txBody>
+                    <a:bodyPr wrap="square"/>
+                    <a:lstStyle/>
+                    <a:p>
+                      <a:r>
+                        <a:rPr sz="1000" b="1">
+                          <a:solidFill>
+                            <a:srgbClr val="FFFFFF"/>
+                          </a:solidFill>
+                          <a:latin typeface="Arial"/>
+                        </a:rPr>
+                        <a:t>engine says</a:t>
+                      </a:r>
+                    </a:p>
+                  </a:txBody>
+                  <a:tcPr marL="54864" marR="54864" marT="18288" marB="18288">
+                    <a:solidFill>
+                      <a:srgbClr val="1F4E79"/>
+                    </a:solidFill>
+                  </a:tcPr>
+                </a:tc>
+                <a:tc>
+                  <a:txBody>
+                    <a:bodyPr wrap="square"/>
+                    <a:lstStyle/>
+                    <a:p>
+                      <a:r>
+                        <a:rPr sz="1000" b="1">
+                          <a:solidFill>
+                            <a:srgbClr val="FFFFFF"/>
+                          </a:solidFill>
+                          <a:latin typeface="Arial"/>
+                        </a:rPr>
+                        <a:t>apart by</a:t>
+                      </a:r>
+                    </a:p>
+                  </a:txBody>
+                  <a:tcPr marL="54864" marR="54864" marT="18288" marB="18288">
+                    <a:solidFill>
+                      <a:srgbClr val="1F4E79"/>
+                    </a:solidFill>
+                  </a:tcPr>
+                </a:tc>
+              </a:tr>
+              <a:tr h="262890">
+                <a:tc>
+                  <a:txBody>
+                    <a:bodyPr wrap="square"/>
+                    <a:lstStyle/>
+                    <a:p>
+                      <a:r>
+                        <a:rPr sz="1000" b="0">
+                          <a:solidFill>
+                            <a:srgbClr val="282828"/>
+                          </a:solidFill>
+                          <a:latin typeface="Arial"/>
+                        </a:rPr>
+                        <a:t>1e-05</a:t>
+                      </a:r>
+                    </a:p>
+                  </a:txBody>
+                  <a:tcPr marL="54864" marR="54864" marT="18288" marB="18288">
+                    <a:solidFill>
+                      <a:srgbClr val="FFFFFF"/>
+                    </a:solidFill>
+                  </a:tcPr>
+                </a:tc>
+                <a:tc>
+                  <a:txBody>
+                    <a:bodyPr wrap="square"/>
+                    <a:lstStyle/>
+                    <a:p>
+                      <a:r>
+                        <a:rPr sz="1000" b="0">
+                          <a:solidFill>
+                            <a:srgbClr val="282828"/>
+                          </a:solidFill>
+                          <a:latin typeface="Arial"/>
+                        </a:rPr>
+                        <a:t>1.13e-06</a:t>
+                      </a:r>
+                    </a:p>
+                  </a:txBody>
+                  <a:tcPr marL="54864" marR="54864" marT="18288" marB="18288">
+                    <a:solidFill>
+                      <a:srgbClr val="FFFFFF"/>
+                    </a:solidFill>
+                  </a:tcPr>
+                </a:tc>
+                <a:tc>
+                  <a:txBody>
+                    <a:bodyPr wrap="square"/>
+                    <a:lstStyle/>
+                    <a:p>
+                      <a:r>
+                        <a:rPr sz="1000" b="0">
+                          <a:solidFill>
+                            <a:srgbClr val="282828"/>
+                          </a:solidFill>
+                          <a:latin typeface="Arial"/>
+                        </a:rPr>
+                        <a:t>5.37e-06</a:t>
+                      </a:r>
+                    </a:p>
+                  </a:txBody>
+                  <a:tcPr marL="54864" marR="54864" marT="18288" marB="18288">
+                    <a:solidFill>
+                      <a:srgbClr val="FFFFFF"/>
+                    </a:solidFill>
+                  </a:tcPr>
+                </a:tc>
+                <a:tc>
+                  <a:txBody>
+                    <a:bodyPr wrap="square"/>
+                    <a:lstStyle/>
+                    <a:p>
+                      <a:r>
+                        <a:rPr sz="1000" b="0">
+                          <a:solidFill>
+                            <a:srgbClr val="282828"/>
+                          </a:solidFill>
+                          <a:latin typeface="Arial"/>
+                        </a:rPr>
+                        <a:t>4.8×</a:t>
+                      </a:r>
+                    </a:p>
+                  </a:txBody>
+                  <a:tcPr marL="54864" marR="54864" marT="18288" marB="18288">
+                    <a:solidFill>
+                      <a:srgbClr val="FFFFFF"/>
+                    </a:solidFill>
+                  </a:tcPr>
+                </a:tc>
+              </a:tr>
+              <a:tr h="262890">
+                <a:tc>
+                  <a:txBody>
+                    <a:bodyPr wrap="square"/>
+                    <a:lstStyle/>
+                    <a:p>
+                      <a:r>
+                        <a:rPr sz="1000" b="0">
+                          <a:solidFill>
+                            <a:srgbClr val="282828"/>
+                          </a:solidFill>
+                          <a:latin typeface="Arial"/>
+                        </a:rPr>
+                        <a:t>3e-06</a:t>
+                      </a:r>
+                    </a:p>
+                  </a:txBody>
+                  <a:tcPr marL="54864" marR="54864" marT="18288" marB="18288">
+                    <a:solidFill>
+                      <a:srgbClr val="ECF1F6"/>
+                    </a:solidFill>
+                  </a:tcPr>
+                </a:tc>
+                <a:tc>
+                  <a:txBody>
+                    <a:bodyPr wrap="square"/>
+                    <a:lstStyle/>
+                    <a:p>
+                      <a:r>
+                        <a:rPr sz="1000" b="0">
+                          <a:solidFill>
+                            <a:srgbClr val="282828"/>
+                          </a:solidFill>
+                          <a:latin typeface="Arial"/>
+                        </a:rPr>
+                        <a:t>1.92e-07</a:t>
+                      </a:r>
+                    </a:p>
+                  </a:txBody>
+                  <a:tcPr marL="54864" marR="54864" marT="18288" marB="18288">
+                    <a:solidFill>
+                      <a:srgbClr val="ECF1F6"/>
+                    </a:solidFill>
+                  </a:tcPr>
+                </a:tc>
+                <a:tc>
+                  <a:txBody>
+                    <a:bodyPr wrap="square"/>
+                    <a:lstStyle/>
+                    <a:p>
+                      <a:r>
+                        <a:rPr sz="1000" b="0">
+                          <a:solidFill>
+                            <a:srgbClr val="282828"/>
+                          </a:solidFill>
+                          <a:latin typeface="Arial"/>
+                        </a:rPr>
+                        <a:t>2.61e-06</a:t>
+                      </a:r>
+                    </a:p>
+                  </a:txBody>
+                  <a:tcPr marL="54864" marR="54864" marT="18288" marB="18288">
+                    <a:solidFill>
+                      <a:srgbClr val="ECF1F6"/>
+                    </a:solidFill>
+                  </a:tcPr>
+                </a:tc>
+                <a:tc>
+                  <a:txBody>
+                    <a:bodyPr wrap="square"/>
+                    <a:lstStyle/>
+                    <a:p>
+                      <a:r>
+                        <a:rPr sz="1000" b="0">
+                          <a:solidFill>
+                            <a:srgbClr val="282828"/>
+                          </a:solidFill>
+                          <a:latin typeface="Arial"/>
+                        </a:rPr>
+                        <a:t>13.6×</a:t>
+                      </a:r>
+                    </a:p>
+                  </a:txBody>
+                  <a:tcPr marL="54864" marR="54864" marT="18288" marB="18288">
+                    <a:solidFill>
+                      <a:srgbClr val="ECF1F6"/>
+                    </a:solidFill>
+                  </a:tcPr>
+                </a:tc>
+              </a:tr>
+              <a:tr h="262890">
+                <a:tc>
+                  <a:txBody>
+                    <a:bodyPr wrap="square"/>
+                    <a:lstStyle/>
+                    <a:p>
+                      <a:r>
+                        <a:rPr sz="1000" b="0">
+                          <a:solidFill>
+                            <a:srgbClr val="282828"/>
+                          </a:solidFill>
+                          <a:latin typeface="Arial"/>
+                        </a:rPr>
+                        <a:t>1e-06</a:t>
+                      </a:r>
+                    </a:p>
+                  </a:txBody>
+                  <a:tcPr marL="54864" marR="54864" marT="18288" marB="18288">
+                    <a:solidFill>
+                      <a:srgbClr val="FFFFFF"/>
+                    </a:solidFill>
+                  </a:tcPr>
+                </a:tc>
+                <a:tc>
+                  <a:txBody>
+                    <a:bodyPr wrap="square"/>
+                    <a:lstStyle/>
+                    <a:p>
+                      <a:r>
+                        <a:rPr sz="1000" b="0">
+                          <a:solidFill>
+                            <a:srgbClr val="282828"/>
+                          </a:solidFill>
+                          <a:latin typeface="Arial"/>
+                        </a:rPr>
+                        <a:t>3.77e-08</a:t>
+                      </a:r>
+                    </a:p>
+                  </a:txBody>
+                  <a:tcPr marL="54864" marR="54864" marT="18288" marB="18288">
+                    <a:solidFill>
+                      <a:srgbClr val="FFFFFF"/>
+                    </a:solidFill>
+                  </a:tcPr>
+                </a:tc>
+                <a:tc>
+                  <a:txBody>
+                    <a:bodyPr wrap="square"/>
+                    <a:lstStyle/>
+                    <a:p>
+                      <a:r>
+                        <a:rPr sz="1000" b="0">
+                          <a:solidFill>
+                            <a:srgbClr val="282828"/>
+                          </a:solidFill>
+                          <a:latin typeface="Arial"/>
+                        </a:rPr>
+                        <a:t>1.50e-06</a:t>
+                      </a:r>
+                    </a:p>
+                  </a:txBody>
+                  <a:tcPr marL="54864" marR="54864" marT="18288" marB="18288">
+                    <a:solidFill>
+                      <a:srgbClr val="FFFFFF"/>
+                    </a:solidFill>
+                  </a:tcPr>
+                </a:tc>
+                <a:tc>
+                  <a:txBody>
+                    <a:bodyPr wrap="square"/>
+                    <a:lstStyle/>
+                    <a:p>
+                      <a:r>
+                        <a:rPr sz="1000" b="0">
+                          <a:solidFill>
+                            <a:srgbClr val="282828"/>
+                          </a:solidFill>
+                          <a:latin typeface="Arial"/>
+                        </a:rPr>
+                        <a:t>40.0×</a:t>
+                      </a:r>
+                    </a:p>
+                  </a:txBody>
+                  <a:tcPr marL="54864" marR="54864" marT="18288" marB="18288">
+                    <a:solidFill>
+                      <a:srgbClr val="FFFFFF"/>
+                    </a:solidFill>
+                  </a:tcPr>
+                </a:tc>
+              </a:tr>
+            </a:tbl>
+          </a:graphicData>
+        </a:graphic>
+      </p:graphicFrame>
+      <p:sp>
+        <p:nvSpPr>
+          <p:cNvPr id="6" name="TextBox 5"/>
           <p:cNvSpPr txBox="1"/>
           <p:nvPr/>
         </p:nvSpPr>
         <p:spPr>
           <a:xfrm>
-            <a:off x="411480" y="3364992"/>
-            <a:ext cx="11368735" cy="274320"/>
+            <a:off x="6400800" y="2496312"/>
+            <a:ext cx="5394960" cy="274320"/>
           </a:xfrm>
           <a:prstGeom prst="rect">
             <a:avLst/>
@@ -4911,7 +5765,7 @@
                 </a:solidFill>
                 <a:latin typeface="Arial"/>
               </a:rPr>
-              <a:t>All knobs live in one parameter file. The narrative record — every question raised, every decision and its result, every gate outcome — is in the campaign log beside the runners.</a:t>
+              <a:t>Dark-zone mean, bare-peak normalised. The model's floor near 4e-06 sits five times above the 8.70e-07 the incumbent already reaches.</a:t>
             </a:r>
           </a:p>
         </p:txBody>
@@ -4924,7 +5778,7 @@
 </p:sld>
 </file>
 
-<file path=ppt/slides/slide2.xml><?xml version="1.0" encoding="utf-8"?>
+<file path=ppt/slides/slide14.xml><?xml version="1.0" encoding="utf-8"?>
 <p:sld xmlns:a="http://schemas.openxmlformats.org/drawingml/2006/main" xmlns:p="http://schemas.openxmlformats.org/presentationml/2006/main" xmlns:r="http://schemas.openxmlformats.org/officeDocument/2006/relationships">
   <p:cSld>
     <p:spTree>
@@ -4968,7 +5822,7 @@
                 </a:solidFill>
                 <a:latin typeface="Arial"/>
               </a:rPr>
-              <a:t>The telescope</a:t>
+              <a:t>What is not in this model</a:t>
             </a:r>
           </a:p>
           <a:p>
@@ -4984,7 +5838,7 @@
                 </a:solidFill>
                 <a:latin typeface="Arial"/>
               </a:rPr>
-              <a:t>0.0473 waves RMS across the field — diffraction-limited at 500 nm</a:t>
+              <a:t>Stated, not omitted</a:t>
             </a:r>
           </a:p>
         </p:txBody>
@@ -5042,7 +5896,7 @@
         <p:spPr>
           <a:xfrm>
             <a:off x="411480" y="1298448"/>
-            <a:ext cx="5806440" cy="274320"/>
+            <a:ext cx="11368735" cy="274320"/>
           </a:xfrm>
           <a:prstGeom prst="rect">
             <a:avLst/>
@@ -5076,16 +5930,16 @@
                 </a:solidFill>
                 <a:latin typeface="Arial"/>
               </a:rPr>
-              <a:t>The design.</a:t>
-            </a:r>
-            <a:r>
-              <a:rPr sz="1200" b="0">
-                <a:solidFill>
-                  <a:srgbClr val="282828"/>
-                </a:solidFill>
-                <a:latin typeface="Arial"/>
-              </a:rPr>
-              <a:t> A 6 m unobscured three-mirror telescope: three base spheres placed for packaging, fold tilts doing the unobscuration, all correction carried by Zernike surface departures. Field ±0.35 arcmin.</a:t>
+              <a:t>No deformable mirrors and no field stop.</a:t>
+            </a:r>
+            <a:r>
+              <a:rPr sz="1200" b="0">
+                <a:solidFill>
+                  <a:srgbClr val="282828"/>
+                </a:solidFill>
+                <a:latin typeface="Arial"/>
+              </a:rPr>
+              <a:t> The reference testbed model carries both. Without them the contrast here is an open-loop number — what the optics deliver, not what a wavefront-control loop would hold — and the dark zone is not the annulus two deformable mirrors would give.</a:t>
             </a:r>
           </a:p>
           <a:p>
@@ -5110,16 +5964,16 @@
                 </a:solidFill>
                 <a:latin typeface="Arial"/>
               </a:rPr>
-              <a:t>The wavefront.</a:t>
-            </a:r>
-            <a:r>
-              <a:rPr sz="1200" b="0">
-                <a:solidFill>
-                  <a:srgbClr val="282828"/>
-                </a:solidFill>
-                <a:latin typeface="Arial"/>
-              </a:rPr>
-              <a:t> 0.0473 waves RMS worst case over the field, against a 0.071-wave diffraction limit.</a:t>
+              <a:t>No metrology loop.</a:t>
+            </a:r>
+            <a:r>
+              <a:rPr sz="1200" b="0">
+                <a:solidFill>
+                  <a:srgbClr val="282828"/>
+                </a:solidFill>
+                <a:latin typeface="Arial"/>
+              </a:rPr>
+              <a:t> The correction in the drift series is image-based: it sees the wavefront directly rather than estimating it from a truss. The corrected leg is therefore an optimistic bound.</a:t>
             </a:r>
           </a:p>
           <a:p>
@@ -5144,16 +5998,16 @@
                 </a:solidFill>
                 <a:latin typeface="Arial"/>
               </a:rPr>
-              <a:t>The packaging.</a:t>
-            </a:r>
-            <a:r>
-              <a:rPr sz="1200" b="0">
-                <a:solidFill>
-                  <a:srgbClr val="282828"/>
-                </a:solidFill>
-                <a:latin typeface="Arial"/>
-              </a:rPr>
-              <a:t> 7.450 m diameter against the 8 m shroud, over a 17.37 m train; 4/4 bodies clear of every beam; 1185/1185 rays survive a standalone reload of the saved prescription.</a:t>
+              <a:t>The coronagraph mask is a clear-pupil design.</a:t>
+            </a:r>
+            <a:r>
+              <a:rPr sz="1200" b="0">
+                <a:solidFill>
+                  <a:srgbClr val="282828"/>
+                </a:solidFill>
+                <a:latin typeface="Arial"/>
+              </a:rPr>
+              <a:t> Re-optimising it for a segmented aperture is a known and separate piece of work; the 2390× above is the size of the prize.</a:t>
             </a:r>
           </a:p>
           <a:p>
@@ -5169,151 +6023,7 @@
                 </a:solidFill>
                 <a:latin typeface="Arial"/>
               </a:rPr>
-              <a:t>•  </a:t>
-            </a:r>
-            <a:r>
-              <a:rPr sz="1200" b="1">
-                <a:solidFill>
-                  <a:srgbClr val="282828"/>
-                </a:solidFill>
-                <a:latin typeface="Arial"/>
-              </a:rPr>
-              <a:t>The one miss.</a:t>
-            </a:r>
-            <a:r>
-              <a:rPr sz="1200" b="0">
-                <a:solidFill>
-                  <a:srgbClr val="282828"/>
-                </a:solidFill>
-                <a:latin typeface="Arial"/>
-              </a:rPr>
-              <a:t> Focal ratio f/25.39 against a requested f/12–20. It is not a tuning failure — see the backup.</a:t>
-            </a:r>
-          </a:p>
-        </p:txBody>
-      </p:sp>
-      <p:pic>
-        <p:nvPicPr>
-          <p:cNvPr id="5" name="Picture 4" descr="s1_layout.png"/>
-          <p:cNvPicPr>
-            <a:picLocks noChangeAspect="1"/>
-          </p:cNvPicPr>
-          <p:nvPr/>
-        </p:nvPicPr>
-        <p:blipFill>
-          <a:blip r:embed="rId2"/>
-          <a:stretch>
-            <a:fillRect/>
-          </a:stretch>
-        </p:blipFill>
-        <p:spPr>
-          <a:xfrm>
-            <a:off x="6980220" y="1298448"/>
-            <a:ext cx="4236119" cy="2348992"/>
-          </a:xfrm>
-          <a:prstGeom prst="rect">
-            <a:avLst/>
-          </a:prstGeom>
-        </p:spPr>
-      </p:pic>
-      <p:sp>
-        <p:nvSpPr>
-          <p:cNvPr id="6" name="TextBox 5"/>
-          <p:cNvSpPr txBox="1"/>
-          <p:nvPr/>
-        </p:nvSpPr>
-        <p:spPr>
-          <a:xfrm>
-            <a:off x="6400800" y="3665727"/>
-            <a:ext cx="5394960" cy="394208"/>
-          </a:xfrm>
-          <a:prstGeom prst="rect">
-            <a:avLst/>
-          </a:prstGeom>
-          <a:noFill/>
-        </p:spPr>
-        <p:txBody>
-          <a:bodyPr wrap="square">
-            <a:spAutoFit/>
-          </a:bodyPr>
-          <a:lstStyle/>
-          <a:p>
-            <a:pPr algn="ctr">
-              <a:spcAft>
-                <a:spcPts val="0"/>
-              </a:spcAft>
-            </a:pPr>
-            <a:r>
-              <a:rPr sz="1000" b="0">
-                <a:solidFill>
-                  <a:srgbClr val="6E6E6E"/>
-                </a:solidFill>
-                <a:latin typeface="Arial"/>
-              </a:rPr>
-              <a:t>The three-mirror train: light enters from the left, folds back to the secondary, returns past the primary to the tertiary and the focus.</a:t>
-            </a:r>
-          </a:p>
-        </p:txBody>
-      </p:sp>
-      <p:pic>
-        <p:nvPicPr>
-          <p:cNvPr id="7" name="Picture 6" descr="s1_wfe_field.png"/>
-          <p:cNvPicPr>
-            <a:picLocks noChangeAspect="1"/>
-          </p:cNvPicPr>
-          <p:nvPr/>
-        </p:nvPicPr>
-        <p:blipFill>
-          <a:blip r:embed="rId3"/>
-          <a:stretch>
-            <a:fillRect/>
-          </a:stretch>
-        </p:blipFill>
-        <p:spPr>
-          <a:xfrm>
-            <a:off x="7705463" y="4096512"/>
-            <a:ext cx="2785632" cy="2367788"/>
-          </a:xfrm>
-          <a:prstGeom prst="rect">
-            <a:avLst/>
-          </a:prstGeom>
-        </p:spPr>
-      </p:pic>
-      <p:sp>
-        <p:nvSpPr>
-          <p:cNvPr id="8" name="TextBox 7"/>
-          <p:cNvSpPr txBox="1"/>
-          <p:nvPr/>
-        </p:nvSpPr>
-        <p:spPr>
-          <a:xfrm>
-            <a:off x="6400800" y="6482588"/>
-            <a:ext cx="5394960" cy="229107"/>
-          </a:xfrm>
-          <a:prstGeom prst="rect">
-            <a:avLst/>
-          </a:prstGeom>
-          <a:noFill/>
-        </p:spPr>
-        <p:txBody>
-          <a:bodyPr wrap="square">
-            <a:spAutoFit/>
-          </a:bodyPr>
-          <a:lstStyle/>
-          <a:p>
-            <a:pPr algn="ctr">
-              <a:spcAft>
-                <a:spcPts val="0"/>
-              </a:spcAft>
-            </a:pPr>
-            <a:r>
-              <a:rPr sz="1000" b="0">
-                <a:solidFill>
-                  <a:srgbClr val="6E6E6E"/>
-                </a:solidFill>
-                <a:latin typeface="Arial"/>
-              </a:rPr>
-              <a:t>Wavefront error over the design field. Worst corner 0.0473 waves.</a:t>
+              <a:t>•  Both additions are existing primitives in the toolkit, so the extension is configuration rather than new machinery.</a:t>
             </a:r>
           </a:p>
         </p:txBody>
@@ -5326,7 +6036,7 @@
 </p:sld>
 </file>
 
-<file path=ppt/slides/slide3.xml><?xml version="1.0" encoding="utf-8"?>
+<file path=ppt/slides/slide15.xml><?xml version="1.0" encoding="utf-8"?>
 <p:sld xmlns:a="http://schemas.openxmlformats.org/drawingml/2006/main" xmlns:p="http://schemas.openxmlformats.org/presentationml/2006/main" xmlns:r="http://schemas.openxmlformats.org/officeDocument/2006/relationships">
   <p:cSld>
     <p:spTree>
@@ -5370,7 +6080,7 @@
                 </a:solidFill>
                 <a:latin typeface="Arial"/>
               </a:rPr>
-              <a:t>The segmented primary</a:t>
+              <a:t>How to reproduce</a:t>
             </a:r>
           </a:p>
           <a:p>
@@ -5386,7 +6096,7 @@
                 </a:solidFill>
                 <a:latin typeface="Arial"/>
               </a:rPr>
-              <a:t>19 segments, and a poke that stays where it is put</a:t>
+              <a:t>Every number on these slides comes from these runs</a:t>
             </a:r>
           </a:p>
         </p:txBody>
@@ -5444,7 +6154,7 @@
         <p:spPr>
           <a:xfrm>
             <a:off x="411480" y="1298448"/>
-            <a:ext cx="5806440" cy="274320"/>
+            <a:ext cx="11368735" cy="274320"/>
           </a:xfrm>
           <a:prstGeom prst="rect">
             <a:avLst/>
@@ -5469,25 +6179,7 @@
                 </a:solidFill>
                 <a:latin typeface="Arial"/>
               </a:rPr>
-              <a:t>•  </a:t>
-            </a:r>
-            <a:r>
-              <a:rPr sz="1200" b="1">
-                <a:solidFill>
-                  <a:srgbClr val="282828"/>
-                </a:solidFill>
-                <a:latin typeface="Arial"/>
-              </a:rPr>
-              <a:t>The segmentation.</a:t>
-            </a:r>
-            <a:r>
-              <a:rPr sz="1200" b="0">
-                <a:solidFill>
-                  <a:srgbClr val="282828"/>
-                </a:solidFill>
-                <a:latin typeface="Arial"/>
-              </a:rPr>
-              <a:t> 19 hexagonal segments, 1.2 m flat to flat, 25 mm gaps, each carrying the parent's solved figure and its own physical polygonal aperture.</a:t>
+              <a:t>•  s1_layout_search then s1_telescope — the layout pick and the telescope.</a:t>
             </a:r>
           </a:p>
           <a:p>
@@ -5503,25 +6195,7 @@
                 </a:solidFill>
                 <a:latin typeface="Arial"/>
               </a:rPr>
-              <a:t>•  </a:t>
-            </a:r>
-            <a:r>
-              <a:rPr sz="1200" b="1">
-                <a:solidFill>
-                  <a:srgbClr val="282828"/>
-                </a:solidFill>
-                <a:latin typeface="Arial"/>
-              </a:rPr>
-              <a:t>The apertures are real.</a:t>
-            </a:r>
-            <a:r>
-              <a:rPr sz="1200" b="0">
-                <a:solidFill>
-                  <a:srgbClr val="282828"/>
-                </a:solidFill>
-                <a:latin typeface="Arial"/>
-              </a:rPr>
-              <a:t> Each segment declares its polygon, and 983 of 985 traced rays survive them; the two that clip land on a gap edge. Reloading the saved prescription standalone reproduces 983/985 — the check that catches a wrongly-framed aperture, which otherwise fails silently on disk.</a:t>
+              <a:t>•  s2_segmentation — the segmented primary and its edge-sensor sidecar.</a:t>
             </a:r>
           </a:p>
           <a:p>
@@ -5537,81 +6211,69 @@
                 </a:solidFill>
                 <a:latin typeface="Arial"/>
               </a:rPr>
-              <a:t>•  </a:t>
-            </a:r>
-            <a:r>
-              <a:rPr sz="1200" b="1">
-                <a:solidFill>
-                  <a:srgbClr val="282828"/>
-                </a:solidFill>
-                <a:latin typeface="Arial"/>
-              </a:rPr>
-              <a:t>The check that matters.</a:t>
-            </a:r>
-            <a:r>
-              <a:rPr sz="1200" b="0">
-                <a:solidFill>
-                  <a:srgbClr val="282828"/>
-                </a:solidFill>
-                <a:latin typeface="Arial"/>
-              </a:rPr>
-              <a:t> Displace one segment by 10 nm along its normal: the wavefront responds 19.91 nm over the 52 rays that land on it and </a:t>
-            </a:r>
-            <a:r>
-              <a:rPr sz="1200" b="1">
-                <a:solidFill>
-                  <a:srgbClr val="282828"/>
-                </a:solidFill>
-                <a:latin typeface="Arial"/>
-              </a:rPr>
-              <a:t>exactly zero</a:t>
-            </a:r>
-            <a:r>
-              <a:rPr sz="1200" b="0">
-                <a:solidFill>
-                  <a:srgbClr val="282828"/>
-                </a:solidFill>
-                <a:latin typeface="Arial"/>
-              </a:rPr>
-              <a:t> over the other 930. The response stays on the segment that moved — which is what makes a per-segment error budget mean anything.</a:t>
-            </a:r>
-          </a:p>
-        </p:txBody>
-      </p:sp>
-      <p:pic>
-        <p:nvPicPr>
-          <p:cNvPr id="5" name="Picture 4" descr="s2_iso.png"/>
-          <p:cNvPicPr>
-            <a:picLocks noChangeAspect="1"/>
-          </p:cNvPicPr>
+              <a:t>•  s3_backend, s3_train_fig, s3_coro, s3_imager then s3b_pupil + s3b_apodizer — the two instruments, the coronagraph on both apertures, and the apodizer redesign.</a:t>
+            </a:r>
+          </a:p>
+          <a:p>
+            <a:pPr>
+              <a:spcAft>
+                <a:spcPts val="600"/>
+              </a:spcAft>
+            </a:pPr>
+            <a:r>
+              <a:rPr sz="1200" b="0">
+                <a:solidFill>
+                  <a:srgbClr val="282828"/>
+                </a:solidFill>
+                <a:latin typeface="Arial"/>
+              </a:rPr>
+              <a:t>•  s4_sensitivities — the error budget, roughly half an hour.</a:t>
+            </a:r>
+          </a:p>
+          <a:p>
+            <a:pPr>
+              <a:spcAft>
+                <a:spcPts val="600"/>
+              </a:spcAft>
+            </a:pPr>
+            <a:r>
+              <a:rPr sz="1200" b="0">
+                <a:solidFill>
+                  <a:srgbClr val="282828"/>
+                </a:solidFill>
+                <a:latin typeface="Arial"/>
+              </a:rPr>
+              <a:t>•  s5_timeseries — the drift series.</a:t>
+            </a:r>
+          </a:p>
+          <a:p>
+            <a:pPr>
+              <a:spcAft>
+                <a:spcPts val="600"/>
+              </a:spcAft>
+            </a:pPr>
+            <a:r>
+              <a:rPr sz="1200" b="0">
+                <a:solidFill>
+                  <a:srgbClr val="282828"/>
+                </a:solidFill>
+                <a:latin typeface="Arial"/>
+              </a:rPr>
+              <a:t>•  python3 deck_e2e6m.py — this deck, from the reports those runs wrote.</a:t>
+            </a:r>
+          </a:p>
+        </p:txBody>
+      </p:sp>
+      <p:sp>
+        <p:nvSpPr>
+          <p:cNvPr id="5" name="TextBox 4"/>
+          <p:cNvSpPr txBox="1"/>
           <p:nvPr/>
-        </p:nvPicPr>
-        <p:blipFill>
-          <a:blip r:embed="rId2"/>
-          <a:stretch>
-            <a:fillRect/>
-          </a:stretch>
-        </p:blipFill>
+        </p:nvSpPr>
         <p:spPr>
           <a:xfrm>
-            <a:off x="7616158" y="1298448"/>
-            <a:ext cx="2964242" cy="2422652"/>
-          </a:xfrm>
-          <a:prstGeom prst="rect">
-            <a:avLst/>
-          </a:prstGeom>
-        </p:spPr>
-      </p:pic>
-      <p:sp>
-        <p:nvSpPr>
-          <p:cNvPr id="6" name="TextBox 5"/>
-          <p:cNvSpPr txBox="1"/>
-          <p:nvPr/>
-        </p:nvSpPr>
-        <p:spPr>
-          <a:xfrm>
-            <a:off x="6400800" y="3739388"/>
-            <a:ext cx="5394960" cy="229107"/>
+            <a:off x="411480" y="3563112"/>
+            <a:ext cx="11368735" cy="274320"/>
           </a:xfrm>
           <a:prstGeom prst="rect">
             <a:avLst/>
@@ -5624,82 +6286,19 @@
           </a:bodyPr>
           <a:lstStyle/>
           <a:p>
-            <a:pPr algn="ctr">
-              <a:spcAft>
-                <a:spcPts val="0"/>
-              </a:spcAft>
-            </a:pPr>
-            <a:r>
-              <a:rPr sz="1000" b="0">
+            <a:pPr>
+              <a:spcAft>
+                <a:spcPts val="600"/>
+              </a:spcAft>
+            </a:pPr>
+            <a:r>
+              <a:rPr sz="1050" b="0">
                 <a:solidFill>
                   <a:srgbClr val="6E6E6E"/>
                 </a:solidFill>
                 <a:latin typeface="Arial"/>
               </a:rPr>
-              <a:t>The segmented telescope: 19 hexagons on the primary, feeding the same fold train.</a:t>
-            </a:r>
-          </a:p>
-        </p:txBody>
-      </p:sp>
-      <p:pic>
-        <p:nvPicPr>
-          <p:cNvPr id="7" name="Picture 6" descr="s2_segmented_footprints.png"/>
-          <p:cNvPicPr>
-            <a:picLocks noChangeAspect="1"/>
-          </p:cNvPicPr>
-          <p:nvPr/>
-        </p:nvPicPr>
-        <p:blipFill>
-          <a:blip r:embed="rId3"/>
-          <a:stretch>
-            <a:fillRect/>
-          </a:stretch>
-        </p:blipFill>
-        <p:spPr>
-          <a:xfrm>
-            <a:off x="7989349" y="4005072"/>
-            <a:ext cx="2217860" cy="2294128"/>
-          </a:xfrm>
-          <a:prstGeom prst="rect">
-            <a:avLst/>
-          </a:prstGeom>
-        </p:spPr>
-      </p:pic>
-      <p:sp>
-        <p:nvSpPr>
-          <p:cNvPr id="8" name="TextBox 7"/>
-          <p:cNvSpPr txBox="1"/>
-          <p:nvPr/>
-        </p:nvSpPr>
-        <p:spPr>
-          <a:xfrm>
-            <a:off x="6400800" y="6317488"/>
-            <a:ext cx="5394960" cy="394208"/>
-          </a:xfrm>
-          <a:prstGeom prst="rect">
-            <a:avLst/>
-          </a:prstGeom>
-          <a:noFill/>
-        </p:spPr>
-        <p:txBody>
-          <a:bodyPr wrap="square">
-            <a:spAutoFit/>
-          </a:bodyPr>
-          <a:lstStyle/>
-          <a:p>
-            <a:pPr algn="ctr">
-              <a:spcAft>
-                <a:spcPts val="0"/>
-              </a:spcAft>
-            </a:pPr>
-            <a:r>
-              <a:rPr sz="1000" b="0">
-                <a:solidFill>
-                  <a:srgbClr val="6E6E6E"/>
-                </a:solidFill>
-                <a:latin typeface="Arial"/>
-              </a:rPr>
-              <a:t>Traced footprints against the emitted aperture polygons. Colour is the segment a ray landed on; black is the declared glass.</a:t>
+              <a:t>All knobs live in one parameter file. The narrative record — every question raised, every decision and its result, every gate outcome — is in the campaign log beside the runners.</a:t>
             </a:r>
           </a:p>
         </p:txBody>
@@ -5712,7 +6311,7 @@
 </p:sld>
 </file>
 
-<file path=ppt/slides/slide4.xml><?xml version="1.0" encoding="utf-8"?>
+<file path=ppt/slides/slide2.xml><?xml version="1.0" encoding="utf-8"?>
 <p:sld xmlns:a="http://schemas.openxmlformats.org/drawingml/2006/main" xmlns:p="http://schemas.openxmlformats.org/presentationml/2006/main" xmlns:r="http://schemas.openxmlformats.org/officeDocument/2006/relationships">
   <p:cSld>
     <p:spTree>
@@ -5756,7 +6355,7 @@
                 </a:solidFill>
                 <a:latin typeface="Arial"/>
               </a:rPr>
-              <a:t>The instrument</a:t>
+              <a:t>The telescope</a:t>
             </a:r>
           </a:p>
           <a:p>
@@ -5772,7 +6371,7 @@
                 </a:solidFill>
                 <a:latin typeface="Arial"/>
               </a:rPr>
-              <a:t>One prescription, 29 elements, and 1 mm of extra shroud diameter</a:t>
+              <a:t>0.0473 waves RMS across the field — diffraction-limited at 500 nm</a:t>
             </a:r>
           </a:p>
         </p:txBody>
@@ -5864,16 +6463,16 @@
                 </a:solidFill>
                 <a:latin typeface="Arial"/>
               </a:rPr>
-              <a:t>The train.</a:t>
-            </a:r>
-            <a:r>
-              <a:rPr sz="1200" b="0">
-                <a:solidFill>
-                  <a:srgbClr val="282828"/>
-                </a:solidFill>
-                <a:latin typeface="Arial"/>
-              </a:rPr>
-              <a:t> A four-mirror relay off the telescope focus: collimate to an accessible pupil, focus to the mask, re-collimate to the Lyot stop, focus to the detector. Spliced onto the segmented telescope as 29 elements of one prescription — not a second model.</a:t>
+              <a:t>The design.</a:t>
+            </a:r>
+            <a:r>
+              <a:rPr sz="1200" b="0">
+                <a:solidFill>
+                  <a:srgbClr val="282828"/>
+                </a:solidFill>
+                <a:latin typeface="Arial"/>
+              </a:rPr>
+              <a:t> A 6 m unobscured three-mirror telescope: three base spheres placed for packaging, fold tilts doing the unobscuration, all correction carried by Zernike surface departures. Field ±0.35 arcmin.</a:t>
             </a:r>
           </a:p>
           <a:p>
@@ -5898,16 +6497,16 @@
                 </a:solidFill>
                 <a:latin typeface="Arial"/>
               </a:rPr>
-              <a:t>Why one train.</a:t>
-            </a:r>
-            <a:r>
-              <a:rPr sz="1200" b="0">
-                <a:solidFill>
-                  <a:srgbClr val="282828"/>
-                </a:solidFill>
-                <a:latin typeface="Arial"/>
-              </a:rPr>
-              <a:t> Only a single model carries a telescope perturbation through to a contrast number. That is what stages four and five then use.</a:t>
+              <a:t>The wavefront.</a:t>
+            </a:r>
+            <a:r>
+              <a:rPr sz="1200" b="0">
+                <a:solidFill>
+                  <a:srgbClr val="282828"/>
+                </a:solidFill>
+                <a:latin typeface="Arial"/>
+              </a:rPr>
+              <a:t> 0.0473 waves RMS worst case over the field, against a 0.071-wave diffraction limit.</a:t>
             </a:r>
           </a:p>
           <a:p>
@@ -5932,16 +6531,16 @@
                 </a:solidFill>
                 <a:latin typeface="Arial"/>
               </a:rPr>
-              <a:t>It fits.</a:t>
-            </a:r>
-            <a:r>
-              <a:rPr sz="1200" b="0">
-                <a:solidFill>
-                  <a:srgbClr val="282828"/>
-                </a:solidFill>
-                <a:latin typeface="Arial"/>
-              </a:rPr>
-              <a:t> 7.451 m against the 8 m shroud, 983 rays through, and the relay lives inside the annulus the fold optics already occupy.</a:t>
+              <a:t>The packaging.</a:t>
+            </a:r>
+            <a:r>
+              <a:rPr sz="1200" b="0">
+                <a:solidFill>
+                  <a:srgbClr val="282828"/>
+                </a:solidFill>
+                <a:latin typeface="Arial"/>
+              </a:rPr>
+              <a:t> 7.450 m diameter against the 8 m shroud, over a 17.37 m train; 4/4 bodies clear of every beam; 1185/1185 rays survive a standalone reload of the saved prescription.</a:t>
             </a:r>
           </a:p>
           <a:p>
@@ -5966,23 +6565,23 @@
                 </a:solidFill>
                 <a:latin typeface="Arial"/>
               </a:rPr>
-              <a:t>It is faithful.</a:t>
-            </a:r>
-            <a:r>
-              <a:rPr sz="1200" b="0">
-                <a:solidFill>
-                  <a:srgbClr val="282828"/>
-                </a:solidFill>
-                <a:latin typeface="Arial"/>
-              </a:rPr>
-              <a:t> The chief ray through the diffraction model agrees with the geometric one to 1.2e-15 m.</a:t>
+              <a:t>The one miss.</a:t>
+            </a:r>
+            <a:r>
+              <a:rPr sz="1200" b="0">
+                <a:solidFill>
+                  <a:srgbClr val="282828"/>
+                </a:solidFill>
+                <a:latin typeface="Arial"/>
+              </a:rPr>
+              <a:t> Focal ratio f/25.39 against a requested f/12–20. It is not a tuning failure — see the backup.</a:t>
             </a:r>
           </a:p>
         </p:txBody>
       </p:sp>
       <p:pic>
         <p:nvPicPr>
-          <p:cNvPr id="5" name="Picture 4" descr="s3_seg_shroud.png"/>
+          <p:cNvPr id="5" name="Picture 4" descr="s1_layout.png"/>
           <p:cNvPicPr>
             <a:picLocks noChangeAspect="1"/>
           </p:cNvPicPr>
@@ -5996,8 +6595,8 @@
         </p:blipFill>
         <p:spPr>
           <a:xfrm>
-            <a:off x="7170900" y="1298448"/>
-            <a:ext cx="3854758" cy="3977131"/>
+            <a:off x="6980220" y="1298448"/>
+            <a:ext cx="4236119" cy="2348992"/>
           </a:xfrm>
           <a:prstGeom prst="rect">
             <a:avLst/>
@@ -6012,7 +6611,70 @@
         </p:nvSpPr>
         <p:spPr>
           <a:xfrm>
-            <a:off x="6400800" y="5293867"/>
+            <a:off x="6400800" y="3665727"/>
+            <a:ext cx="5394960" cy="394208"/>
+          </a:xfrm>
+          <a:prstGeom prst="rect">
+            <a:avLst/>
+          </a:prstGeom>
+          <a:noFill/>
+        </p:spPr>
+        <p:txBody>
+          <a:bodyPr wrap="square">
+            <a:spAutoFit/>
+          </a:bodyPr>
+          <a:lstStyle/>
+          <a:p>
+            <a:pPr algn="ctr">
+              <a:spcAft>
+                <a:spcPts val="0"/>
+              </a:spcAft>
+            </a:pPr>
+            <a:r>
+              <a:rPr sz="1000" b="0">
+                <a:solidFill>
+                  <a:srgbClr val="6E6E6E"/>
+                </a:solidFill>
+                <a:latin typeface="Arial"/>
+              </a:rPr>
+              <a:t>The three-mirror train: light enters from the left, folds back to the secondary, returns past the primary to the tertiary and the focus.</a:t>
+            </a:r>
+          </a:p>
+        </p:txBody>
+      </p:sp>
+      <p:pic>
+        <p:nvPicPr>
+          <p:cNvPr id="7" name="Picture 6" descr="s1_wfe_field.png"/>
+          <p:cNvPicPr>
+            <a:picLocks noChangeAspect="1"/>
+          </p:cNvPicPr>
+          <p:nvPr/>
+        </p:nvPicPr>
+        <p:blipFill>
+          <a:blip r:embed="rId3"/>
+          <a:stretch>
+            <a:fillRect/>
+          </a:stretch>
+        </p:blipFill>
+        <p:spPr>
+          <a:xfrm>
+            <a:off x="7705463" y="4096512"/>
+            <a:ext cx="2785632" cy="2367788"/>
+          </a:xfrm>
+          <a:prstGeom prst="rect">
+            <a:avLst/>
+          </a:prstGeom>
+        </p:spPr>
+      </p:pic>
+      <p:sp>
+        <p:nvSpPr>
+          <p:cNvPr id="8" name="TextBox 7"/>
+          <p:cNvSpPr txBox="1"/>
+          <p:nvPr/>
+        </p:nvSpPr>
+        <p:spPr>
+          <a:xfrm>
+            <a:off x="6400800" y="6482588"/>
             <a:ext cx="5394960" cy="229107"/>
           </a:xfrm>
           <a:prstGeom prst="rect">
@@ -6038,7 +6700,732 @@
                 </a:solidFill>
                 <a:latin typeface="Arial"/>
               </a:rPr>
-              <a:t>The folded observatory seen down the launch axis, inside the 8 m shroud circle.</a:t>
+              <a:t>Wavefront error over the design field. Worst corner 0.0473 waves.</a:t>
+            </a:r>
+          </a:p>
+        </p:txBody>
+      </p:sp>
+    </p:spTree>
+  </p:cSld>
+  <p:clrMapOvr>
+    <a:masterClrMapping/>
+  </p:clrMapOvr>
+</p:sld>
+</file>
+
+<file path=ppt/slides/slide3.xml><?xml version="1.0" encoding="utf-8"?>
+<p:sld xmlns:a="http://schemas.openxmlformats.org/drawingml/2006/main" xmlns:p="http://schemas.openxmlformats.org/presentationml/2006/main" xmlns:r="http://schemas.openxmlformats.org/officeDocument/2006/relationships">
+  <p:cSld>
+    <p:spTree>
+      <p:nvGrpSpPr>
+        <p:cNvPr id="1" name=""/>
+        <p:cNvGrpSpPr/>
+        <p:nvPr/>
+      </p:nvGrpSpPr>
+      <p:grpSpPr/>
+      <p:sp>
+        <p:nvSpPr>
+          <p:cNvPr id="2" name="TextBox 1"/>
+          <p:cNvSpPr txBox="1"/>
+          <p:nvPr/>
+        </p:nvSpPr>
+        <p:spPr>
+          <a:xfrm>
+            <a:off x="411480" y="201168"/>
+            <a:ext cx="11368735" cy="914400"/>
+          </a:xfrm>
+          <a:prstGeom prst="rect">
+            <a:avLst/>
+          </a:prstGeom>
+          <a:noFill/>
+        </p:spPr>
+        <p:txBody>
+          <a:bodyPr wrap="square">
+            <a:spAutoFit/>
+          </a:bodyPr>
+          <a:lstStyle/>
+          <a:p>
+            <a:pPr>
+              <a:spcAft>
+                <a:spcPts val="400"/>
+              </a:spcAft>
+            </a:pPr>
+            <a:r>
+              <a:rPr sz="2400" b="1">
+                <a:solidFill>
+                  <a:srgbClr val="1F4E79"/>
+                </a:solidFill>
+                <a:latin typeface="Arial"/>
+              </a:rPr>
+              <a:t>The segmented primary</a:t>
+            </a:r>
+          </a:p>
+          <a:p>
+            <a:pPr>
+              <a:spcAft>
+                <a:spcPts val="0"/>
+              </a:spcAft>
+            </a:pPr>
+            <a:r>
+              <a:rPr sz="1250" b="0">
+                <a:solidFill>
+                  <a:srgbClr val="6E6E6E"/>
+                </a:solidFill>
+                <a:latin typeface="Arial"/>
+              </a:rPr>
+              <a:t>19 segments, and a poke that stays where it is put</a:t>
+            </a:r>
+          </a:p>
+        </p:txBody>
+      </p:sp>
+      <p:sp>
+        <p:nvSpPr>
+          <p:cNvPr id="3" name="Rectangle 2"/>
+          <p:cNvSpPr/>
+          <p:nvPr/>
+        </p:nvSpPr>
+        <p:spPr>
+          <a:xfrm>
+            <a:off x="411480" y="1133856"/>
+            <a:ext cx="11368735" cy="20320"/>
+          </a:xfrm>
+          <a:prstGeom prst="rect">
+            <a:avLst/>
+          </a:prstGeom>
+          <a:solidFill>
+            <a:srgbClr val="B8C6D4"/>
+          </a:solidFill>
+          <a:ln>
+            <a:noFill/>
+          </a:ln>
+          <a:effectLst/>
+        </p:spPr>
+        <p:style>
+          <a:lnRef idx="1">
+            <a:schemeClr val="accent1"/>
+          </a:lnRef>
+          <a:fillRef idx="3">
+            <a:schemeClr val="accent1"/>
+          </a:fillRef>
+          <a:effectRef idx="2">
+            <a:schemeClr val="accent1"/>
+          </a:effectRef>
+          <a:fontRef idx="minor">
+            <a:schemeClr val="lt1"/>
+          </a:fontRef>
+        </p:style>
+        <p:txBody>
+          <a:bodyPr rtlCol="0" anchor="ctr"/>
+          <a:lstStyle/>
+          <a:p>
+            <a:pPr algn="ctr"/>
+          </a:p>
+        </p:txBody>
+      </p:sp>
+      <p:sp>
+        <p:nvSpPr>
+          <p:cNvPr id="4" name="TextBox 3"/>
+          <p:cNvSpPr txBox="1"/>
+          <p:nvPr/>
+        </p:nvSpPr>
+        <p:spPr>
+          <a:xfrm>
+            <a:off x="411480" y="1298448"/>
+            <a:ext cx="5806440" cy="274320"/>
+          </a:xfrm>
+          <a:prstGeom prst="rect">
+            <a:avLst/>
+          </a:prstGeom>
+          <a:noFill/>
+        </p:spPr>
+        <p:txBody>
+          <a:bodyPr wrap="square">
+            <a:spAutoFit/>
+          </a:bodyPr>
+          <a:lstStyle/>
+          <a:p>
+            <a:pPr>
+              <a:spcAft>
+                <a:spcPts val="600"/>
+              </a:spcAft>
+            </a:pPr>
+            <a:r>
+              <a:rPr sz="1200" b="0">
+                <a:solidFill>
+                  <a:srgbClr val="282828"/>
+                </a:solidFill>
+                <a:latin typeface="Arial"/>
+              </a:rPr>
+              <a:t>•  </a:t>
+            </a:r>
+            <a:r>
+              <a:rPr sz="1200" b="1">
+                <a:solidFill>
+                  <a:srgbClr val="282828"/>
+                </a:solidFill>
+                <a:latin typeface="Arial"/>
+              </a:rPr>
+              <a:t>The segmentation.</a:t>
+            </a:r>
+            <a:r>
+              <a:rPr sz="1200" b="0">
+                <a:solidFill>
+                  <a:srgbClr val="282828"/>
+                </a:solidFill>
+                <a:latin typeface="Arial"/>
+              </a:rPr>
+              <a:t> 19 hexagonal segments, 1.2 m flat to flat, 25 mm gaps, each carrying the parent's solved figure and its own physical polygonal aperture.</a:t>
+            </a:r>
+          </a:p>
+          <a:p>
+            <a:pPr>
+              <a:spcAft>
+                <a:spcPts val="600"/>
+              </a:spcAft>
+            </a:pPr>
+            <a:r>
+              <a:rPr sz="1200" b="0">
+                <a:solidFill>
+                  <a:srgbClr val="282828"/>
+                </a:solidFill>
+                <a:latin typeface="Arial"/>
+              </a:rPr>
+              <a:t>•  </a:t>
+            </a:r>
+            <a:r>
+              <a:rPr sz="1200" b="1">
+                <a:solidFill>
+                  <a:srgbClr val="282828"/>
+                </a:solidFill>
+                <a:latin typeface="Arial"/>
+              </a:rPr>
+              <a:t>The apertures are real.</a:t>
+            </a:r>
+            <a:r>
+              <a:rPr sz="1200" b="0">
+                <a:solidFill>
+                  <a:srgbClr val="282828"/>
+                </a:solidFill>
+                <a:latin typeface="Arial"/>
+              </a:rPr>
+              <a:t> Each segment declares its polygon, and 983 of 985 traced rays survive them; the two that clip land on a gap edge. Reloading the saved prescription standalone reproduces 983/985 — the check that catches a wrongly-framed aperture, which otherwise fails silently on disk.</a:t>
+            </a:r>
+          </a:p>
+          <a:p>
+            <a:pPr>
+              <a:spcAft>
+                <a:spcPts val="600"/>
+              </a:spcAft>
+            </a:pPr>
+            <a:r>
+              <a:rPr sz="1200" b="0">
+                <a:solidFill>
+                  <a:srgbClr val="282828"/>
+                </a:solidFill>
+                <a:latin typeface="Arial"/>
+              </a:rPr>
+              <a:t>•  </a:t>
+            </a:r>
+            <a:r>
+              <a:rPr sz="1200" b="1">
+                <a:solidFill>
+                  <a:srgbClr val="282828"/>
+                </a:solidFill>
+                <a:latin typeface="Arial"/>
+              </a:rPr>
+              <a:t>The check that matters.</a:t>
+            </a:r>
+            <a:r>
+              <a:rPr sz="1200" b="0">
+                <a:solidFill>
+                  <a:srgbClr val="282828"/>
+                </a:solidFill>
+                <a:latin typeface="Arial"/>
+              </a:rPr>
+              <a:t> Displace one segment by 10 nm along its normal: the wavefront responds 19.91 nm over the 52 rays that land on it and </a:t>
+            </a:r>
+            <a:r>
+              <a:rPr sz="1200" b="1">
+                <a:solidFill>
+                  <a:srgbClr val="282828"/>
+                </a:solidFill>
+                <a:latin typeface="Arial"/>
+              </a:rPr>
+              <a:t>exactly zero</a:t>
+            </a:r>
+            <a:r>
+              <a:rPr sz="1200" b="0">
+                <a:solidFill>
+                  <a:srgbClr val="282828"/>
+                </a:solidFill>
+                <a:latin typeface="Arial"/>
+              </a:rPr>
+              <a:t> over the other 930. The response stays on the segment that moved — which is what makes a per-segment error budget mean anything.</a:t>
+            </a:r>
+          </a:p>
+        </p:txBody>
+      </p:sp>
+      <p:pic>
+        <p:nvPicPr>
+          <p:cNvPr id="5" name="Picture 4" descr="s2_iso.png"/>
+          <p:cNvPicPr>
+            <a:picLocks noChangeAspect="1"/>
+          </p:cNvPicPr>
+          <p:nvPr/>
+        </p:nvPicPr>
+        <p:blipFill>
+          <a:blip r:embed="rId2"/>
+          <a:stretch>
+            <a:fillRect/>
+          </a:stretch>
+        </p:blipFill>
+        <p:spPr>
+          <a:xfrm>
+            <a:off x="6806240" y="1298448"/>
+            <a:ext cx="4584078" cy="2422652"/>
+          </a:xfrm>
+          <a:prstGeom prst="rect">
+            <a:avLst/>
+          </a:prstGeom>
+        </p:spPr>
+      </p:pic>
+      <p:sp>
+        <p:nvSpPr>
+          <p:cNvPr id="6" name="TextBox 5"/>
+          <p:cNvSpPr txBox="1"/>
+          <p:nvPr/>
+        </p:nvSpPr>
+        <p:spPr>
+          <a:xfrm>
+            <a:off x="6400800" y="3739388"/>
+            <a:ext cx="5394960" cy="229107"/>
+          </a:xfrm>
+          <a:prstGeom prst="rect">
+            <a:avLst/>
+          </a:prstGeom>
+          <a:noFill/>
+        </p:spPr>
+        <p:txBody>
+          <a:bodyPr wrap="square">
+            <a:spAutoFit/>
+          </a:bodyPr>
+          <a:lstStyle/>
+          <a:p>
+            <a:pPr algn="ctr">
+              <a:spcAft>
+                <a:spcPts val="0"/>
+              </a:spcAft>
+            </a:pPr>
+            <a:r>
+              <a:rPr sz="1000" b="0">
+                <a:solidFill>
+                  <a:srgbClr val="6E6E6E"/>
+                </a:solidFill>
+                <a:latin typeface="Arial"/>
+              </a:rPr>
+              <a:t>The segmented telescope: 19 hexagons on the primary, feeding the same fold train.</a:t>
+            </a:r>
+          </a:p>
+        </p:txBody>
+      </p:sp>
+      <p:pic>
+        <p:nvPicPr>
+          <p:cNvPr id="7" name="Picture 6" descr="s2_segmented_footprints.png"/>
+          <p:cNvPicPr>
+            <a:picLocks noChangeAspect="1"/>
+          </p:cNvPicPr>
+          <p:nvPr/>
+        </p:nvPicPr>
+        <p:blipFill>
+          <a:blip r:embed="rId3"/>
+          <a:stretch>
+            <a:fillRect/>
+          </a:stretch>
+        </p:blipFill>
+        <p:spPr>
+          <a:xfrm>
+            <a:off x="7989349" y="4005072"/>
+            <a:ext cx="2217860" cy="2294128"/>
+          </a:xfrm>
+          <a:prstGeom prst="rect">
+            <a:avLst/>
+          </a:prstGeom>
+        </p:spPr>
+      </p:pic>
+      <p:sp>
+        <p:nvSpPr>
+          <p:cNvPr id="8" name="TextBox 7"/>
+          <p:cNvSpPr txBox="1"/>
+          <p:nvPr/>
+        </p:nvSpPr>
+        <p:spPr>
+          <a:xfrm>
+            <a:off x="6400800" y="6317488"/>
+            <a:ext cx="5394960" cy="394208"/>
+          </a:xfrm>
+          <a:prstGeom prst="rect">
+            <a:avLst/>
+          </a:prstGeom>
+          <a:noFill/>
+        </p:spPr>
+        <p:txBody>
+          <a:bodyPr wrap="square">
+            <a:spAutoFit/>
+          </a:bodyPr>
+          <a:lstStyle/>
+          <a:p>
+            <a:pPr algn="ctr">
+              <a:spcAft>
+                <a:spcPts val="0"/>
+              </a:spcAft>
+            </a:pPr>
+            <a:r>
+              <a:rPr sz="1000" b="0">
+                <a:solidFill>
+                  <a:srgbClr val="6E6E6E"/>
+                </a:solidFill>
+                <a:latin typeface="Arial"/>
+              </a:rPr>
+              <a:t>Traced footprints against the emitted aperture polygons. Colour is the segment a ray landed on; black is the declared glass.</a:t>
+            </a:r>
+          </a:p>
+        </p:txBody>
+      </p:sp>
+    </p:spTree>
+  </p:cSld>
+  <p:clrMapOvr>
+    <a:masterClrMapping/>
+  </p:clrMapOvr>
+</p:sld>
+</file>
+
+<file path=ppt/slides/slide4.xml><?xml version="1.0" encoding="utf-8"?>
+<p:sld xmlns:a="http://schemas.openxmlformats.org/drawingml/2006/main" xmlns:p="http://schemas.openxmlformats.org/presentationml/2006/main" xmlns:r="http://schemas.openxmlformats.org/officeDocument/2006/relationships">
+  <p:cSld>
+    <p:spTree>
+      <p:nvGrpSpPr>
+        <p:cNvPr id="1" name=""/>
+        <p:cNvGrpSpPr/>
+        <p:nvPr/>
+      </p:nvGrpSpPr>
+      <p:grpSpPr/>
+      <p:sp>
+        <p:nvSpPr>
+          <p:cNvPr id="2" name="TextBox 1"/>
+          <p:cNvSpPr txBox="1"/>
+          <p:nvPr/>
+        </p:nvSpPr>
+        <p:spPr>
+          <a:xfrm>
+            <a:off x="411480" y="201168"/>
+            <a:ext cx="11368735" cy="914400"/>
+          </a:xfrm>
+          <a:prstGeom prst="rect">
+            <a:avLst/>
+          </a:prstGeom>
+          <a:noFill/>
+        </p:spPr>
+        <p:txBody>
+          <a:bodyPr wrap="square">
+            <a:spAutoFit/>
+          </a:bodyPr>
+          <a:lstStyle/>
+          <a:p>
+            <a:pPr>
+              <a:spcAft>
+                <a:spcPts val="400"/>
+              </a:spcAft>
+            </a:pPr>
+            <a:r>
+              <a:rPr sz="2400" b="1">
+                <a:solidFill>
+                  <a:srgbClr val="1F4E79"/>
+                </a:solidFill>
+                <a:latin typeface="Arial"/>
+              </a:rPr>
+              <a:t>Two instruments</a:t>
+            </a:r>
+          </a:p>
+          <a:p>
+            <a:pPr>
+              <a:spcAft>
+                <a:spcPts val="0"/>
+              </a:spcAft>
+            </a:pPr>
+            <a:r>
+              <a:rPr sz="1250" b="0">
+                <a:solidFill>
+                  <a:srgbClr val="6E6E6E"/>
+                </a:solidFill>
+                <a:latin typeface="Arial"/>
+              </a:rPr>
+              <a:t>A second camera costs nothing in shroud diameter</a:t>
+            </a:r>
+          </a:p>
+        </p:txBody>
+      </p:sp>
+      <p:sp>
+        <p:nvSpPr>
+          <p:cNvPr id="3" name="Rectangle 2"/>
+          <p:cNvSpPr/>
+          <p:nvPr/>
+        </p:nvSpPr>
+        <p:spPr>
+          <a:xfrm>
+            <a:off x="411480" y="1133856"/>
+            <a:ext cx="11368735" cy="20320"/>
+          </a:xfrm>
+          <a:prstGeom prst="rect">
+            <a:avLst/>
+          </a:prstGeom>
+          <a:solidFill>
+            <a:srgbClr val="B8C6D4"/>
+          </a:solidFill>
+          <a:ln>
+            <a:noFill/>
+          </a:ln>
+          <a:effectLst/>
+        </p:spPr>
+        <p:style>
+          <a:lnRef idx="1">
+            <a:schemeClr val="accent1"/>
+          </a:lnRef>
+          <a:fillRef idx="3">
+            <a:schemeClr val="accent1"/>
+          </a:fillRef>
+          <a:effectRef idx="2">
+            <a:schemeClr val="accent1"/>
+          </a:effectRef>
+          <a:fontRef idx="minor">
+            <a:schemeClr val="lt1"/>
+          </a:fontRef>
+        </p:style>
+        <p:txBody>
+          <a:bodyPr rtlCol="0" anchor="ctr"/>
+          <a:lstStyle/>
+          <a:p>
+            <a:pPr algn="ctr"/>
+          </a:p>
+        </p:txBody>
+      </p:sp>
+      <p:sp>
+        <p:nvSpPr>
+          <p:cNvPr id="4" name="TextBox 3"/>
+          <p:cNvSpPr txBox="1"/>
+          <p:nvPr/>
+        </p:nvSpPr>
+        <p:spPr>
+          <a:xfrm>
+            <a:off x="411480" y="1298448"/>
+            <a:ext cx="5806440" cy="274320"/>
+          </a:xfrm>
+          <a:prstGeom prst="rect">
+            <a:avLst/>
+          </a:prstGeom>
+          <a:noFill/>
+        </p:spPr>
+        <p:txBody>
+          <a:bodyPr wrap="square">
+            <a:spAutoFit/>
+          </a:bodyPr>
+          <a:lstStyle/>
+          <a:p>
+            <a:pPr>
+              <a:spcAft>
+                <a:spcPts val="600"/>
+              </a:spcAft>
+            </a:pPr>
+            <a:r>
+              <a:rPr sz="1200" b="0">
+                <a:solidFill>
+                  <a:srgbClr val="282828"/>
+                </a:solidFill>
+                <a:latin typeface="Arial"/>
+              </a:rPr>
+              <a:t>•  </a:t>
+            </a:r>
+            <a:r>
+              <a:rPr sz="1200" b="1">
+                <a:solidFill>
+                  <a:srgbClr val="282828"/>
+                </a:solidFill>
+                <a:latin typeface="Arial"/>
+              </a:rPr>
+              <a:t>The coronagraph.</a:t>
+            </a:r>
+            <a:r>
+              <a:rPr sz="1200" b="0">
+                <a:solidFill>
+                  <a:srgbClr val="282828"/>
+                </a:solidFill>
+                <a:latin typeface="Arial"/>
+              </a:rPr>
+              <a:t> A four-mirror relay off the telescope focus: collimate to an accessible pupil, focus to the mask, re-collimate to the Lyot stop, focus to the detector. Spliced onto the segmented telescope as 29 elements of one prescription — not a second model. Only a single model carries a telescope perturbation through to a contrast number, which is what stages four and five need.</a:t>
+            </a:r>
+          </a:p>
+          <a:p>
+            <a:pPr>
+              <a:spcAft>
+                <a:spcPts val="600"/>
+              </a:spcAft>
+            </a:pPr>
+            <a:r>
+              <a:rPr sz="1200" b="0">
+                <a:solidFill>
+                  <a:srgbClr val="282828"/>
+                </a:solidFill>
+                <a:latin typeface="Arial"/>
+              </a:rPr>
+              <a:t>•  </a:t>
+            </a:r>
+            <a:r>
+              <a:rPr sz="1200" b="1">
+                <a:solidFill>
+                  <a:srgbClr val="282828"/>
+                </a:solidFill>
+                <a:latin typeface="Arial"/>
+              </a:rPr>
+              <a:t>The imager.</a:t>
+            </a:r>
+            <a:r>
+              <a:rPr sz="1200" b="0">
+                <a:solidFill>
+                  <a:srgbClr val="282828"/>
+                </a:solidFill>
+                <a:latin typeface="Arial"/>
+              </a:rPr>
+              <a:t> A deployable pick-off at the shared pupil feeds its own f/19 camera: 0.0042 waves RMS, Strehl 0.9993, and a 0.87 µm geometric spot against a 9.5 µm diffraction core — the image is limited by diffraction, not by the optics.</a:t>
+            </a:r>
+          </a:p>
+          <a:p>
+            <a:pPr>
+              <a:spcAft>
+                <a:spcPts val="600"/>
+              </a:spcAft>
+            </a:pPr>
+            <a:r>
+              <a:rPr sz="1200" b="0">
+                <a:solidFill>
+                  <a:srgbClr val="282828"/>
+                </a:solidFill>
+                <a:latin typeface="Arial"/>
+              </a:rPr>
+              <a:t>•  </a:t>
+            </a:r>
+            <a:r>
+              <a:rPr sz="1200" b="1">
+                <a:solidFill>
+                  <a:srgbClr val="282828"/>
+                </a:solidFill>
+                <a:latin typeface="Arial"/>
+              </a:rPr>
+              <a:t>Both fit.</a:t>
+            </a:r>
+            <a:r>
+              <a:rPr sz="1200" b="0">
+                <a:solidFill>
+                  <a:srgbClr val="282828"/>
+                </a:solidFill>
+                <a:latin typeface="Arial"/>
+              </a:rPr>
+              <a:t> 7.451 m against the 8 m shroud, for either leg and for the two together. The 6 m primary sets the envelope; the instruments are centimetre-class.</a:t>
+            </a:r>
+          </a:p>
+          <a:p>
+            <a:pPr>
+              <a:spcAft>
+                <a:spcPts val="600"/>
+              </a:spcAft>
+            </a:pPr>
+            <a:r>
+              <a:rPr sz="1200" b="0">
+                <a:solidFill>
+                  <a:srgbClr val="282828"/>
+                </a:solidFill>
+                <a:latin typeface="Arial"/>
+              </a:rPr>
+              <a:t>•  </a:t>
+            </a:r>
+            <a:r>
+              <a:rPr sz="1200" b="1">
+                <a:solidFill>
+                  <a:srgbClr val="282828"/>
+                </a:solidFill>
+                <a:latin typeface="Arial"/>
+              </a:rPr>
+              <a:t>The models are faithful.</a:t>
+            </a:r>
+            <a:r>
+              <a:rPr sz="1200" b="0">
+                <a:solidFill>
+                  <a:srgbClr val="282828"/>
+                </a:solidFill>
+                <a:latin typeface="Arial"/>
+              </a:rPr>
+              <a:t> The chief ray through the diffraction model agrees with the geometric one to 1.2e-15 m, and the imager leg loses no rays the telescope did not already lose (983/985).</a:t>
+            </a:r>
+          </a:p>
+        </p:txBody>
+      </p:sp>
+      <p:pic>
+        <p:nvPicPr>
+          <p:cNvPr id="5" name="Picture 4" descr="s3_imager_shroud.png"/>
+          <p:cNvPicPr>
+            <a:picLocks noChangeAspect="1"/>
+          </p:cNvPicPr>
+          <p:nvPr/>
+        </p:nvPicPr>
+        <p:blipFill>
+          <a:blip r:embed="rId2"/>
+          <a:stretch>
+            <a:fillRect/>
+          </a:stretch>
+        </p:blipFill>
+        <p:spPr>
+          <a:xfrm>
+            <a:off x="6470214" y="1298448"/>
+            <a:ext cx="5256130" cy="3812032"/>
+          </a:xfrm>
+          <a:prstGeom prst="rect">
+            <a:avLst/>
+          </a:prstGeom>
+        </p:spPr>
+      </p:pic>
+      <p:sp>
+        <p:nvSpPr>
+          <p:cNvPr id="6" name="TextBox 5"/>
+          <p:cNvSpPr txBox="1"/>
+          <p:nvPr/>
+        </p:nvSpPr>
+        <p:spPr>
+          <a:xfrm>
+            <a:off x="6400800" y="5128767"/>
+            <a:ext cx="5394960" cy="394208"/>
+          </a:xfrm>
+          <a:prstGeom prst="rect">
+            <a:avLst/>
+          </a:prstGeom>
+          <a:noFill/>
+        </p:spPr>
+        <p:txBody>
+          <a:bodyPr wrap="square">
+            <a:spAutoFit/>
+          </a:bodyPr>
+          <a:lstStyle/>
+          <a:p>
+            <a:pPr algn="ctr">
+              <a:spcAft>
+                <a:spcPts val="0"/>
+              </a:spcAft>
+            </a:pPr>
+            <a:r>
+              <a:rPr sz="1000" b="0">
+                <a:solidFill>
+                  <a:srgbClr val="6E6E6E"/>
+                </a:solidFill>
+                <a:latin typeface="Arial"/>
+              </a:rPr>
+              <a:t>Both legs down the launch axis, inside the 8 m shroud circle. The instrument optics are the inset — at this scale they are a few pixels.</a:t>
             </a:r>
           </a:p>
         </p:txBody>
@@ -7995,7 +9382,7 @@
         <p:spPr>
           <a:xfrm>
             <a:off x="6400800" y="2688336"/>
-            <a:ext cx="5394960" cy="3224573"/>
+            <a:ext cx="5394960" cy="2759109"/>
           </a:xfrm>
           <a:prstGeom prst="rect">
             <a:avLst/>
@@ -8010,8 +9397,8 @@
         </p:nvSpPr>
         <p:spPr>
           <a:xfrm>
-            <a:off x="6400800" y="5931197"/>
-            <a:ext cx="5394960" cy="394208"/>
+            <a:off x="6400800" y="5465733"/>
+            <a:ext cx="5394960" cy="559307"/>
           </a:xfrm>
           <a:prstGeom prst="rect">
             <a:avLst/>
@@ -8036,7 +9423,7 @@
                 </a:solidFill>
                 <a:latin typeface="Arial"/>
               </a:rPr>
-              <a:t>The modelled observatory: 19 segments, three telescope mirrors and the instrument relay, in one prescription.</a:t>
+              <a:t>The modelled observatory: the 19-segment primary and the beam it feeds, in one prescription. The secondaries and the instrument optics are decimetre- and centimetre-class and do not resolve at 6 m scale.</a:t>
             </a:r>
           </a:p>
         </p:txBody>
